--- a/CapstoneEcommerceSegmentation/reports/Capstone_Ecommerce_Segmentation.pptx
+++ b/CapstoneEcommerceSegmentation/reports/Capstone_Ecommerce_Segmentation.pptx
@@ -424,7 +424,7 @@
                   <c:v>Invalid unit price</c:v>
                 </c:pt>
                 <c:pt idx="4">
-                  <c:v>Non-product stock codes</c:v>
+                  <c:v>Non-numeric stock codes</c:v>
                 </c:pt>
                 <c:pt idx="5">
                   <c:v>Exact duplicates</c:v>
@@ -11044,17 +11044,22 @@
           <a:lstStyle/>
           <a:p>
             <a:r>
-              <a:t>[~20s · running 0:20]</a:t>
-            </a:r>
-          </a:p>
-          <a:p>
-            <a:r>
-              <a:t>Open: 'Every retailer knows some customers matter more than others. The question is which ones, how many, and what to do about it.' Introduce yourself and the project in one line.</a:t>
-            </a:r>
-          </a:p>
-          <a:p>
-            <a:r>
-              <a:t>Fill in [Presenter name] and [Date] before presenting.</a:t>
+              <a:t>[~15s · running 0:15]</a:t>
+            </a:r>
+          </a:p>
+          <a:p>
+            <a:r>
+              <a:t>OPEN: “Good [morning/afternoon]. I'm [name], and my capstone asks one question: who actually drives the revenue in an online retail business?”</a:t>
+            </a:r>
+          </a:p>
+          <a:p>
+            <a:r>
+              <a:t>• Fill in [Presenter name] and [Date] on the slide before presenting.</a:t>
+            </a:r>
+          </a:p>
+          <a:p>
+            <a:r>
+              <a:t>NEXT: “Here's how the next ten minutes are organised.”</a:t>
             </a:r>
           </a:p>
         </p:txBody>
@@ -11124,32 +11129,32 @@
           <a:lstStyle/>
           <a:p>
             <a:r>
-              <a:t>[~45s · running 8:00]</a:t>
-            </a:r>
-          </a:p>
-          <a:p>
-            <a:r>
-              <a:t>• The brief asks which attributes drive segmentation. Two independent views:</a:t>
-            </a:r>
-          </a:p>
-          <a:p>
-            <a:r>
-              <a:t>  – Centroid gap: how far apart the two segment centres are on each scaled feature (F 1.57, M 1.47, R 1.31).</a:t>
-            </a:r>
-          </a:p>
-          <a:p>
-            <a:r>
-              <a:t>  – Random Forest impurity importance: F 37%, M 35%, R 28%.</a:t>
-            </a:r>
-          </a:p>
-          <a:p>
-            <a:r>
-              <a:t>• Both rank Frequency first. Business translation: repeat purchasing is the dividing line.</a:t>
-            </a:r>
-          </a:p>
-          <a:p>
-            <a:r>
-              <a:t>• Caveat if asked: importance explains the labels, not causation.</a:t>
+              <a:t>[~45s · running 7:00]</a:t>
+            </a:r>
+          </a:p>
+          <a:p>
+            <a:r>
+              <a:t>OPEN: “I looked at that from two independent angles, and they agree.”</a:t>
+            </a:r>
+          </a:p>
+          <a:p>
+            <a:r>
+              <a:t>• Centroid gap in standard units: Frequency 1.57, Monetary 1.47, Recency 1.31.</a:t>
+            </a:r>
+          </a:p>
+          <a:p>
+            <a:r>
+              <a:t>• Random Forest importance: Frequency 37%, Monetary 35%, Recency 28%.</a:t>
+            </a:r>
+          </a:p>
+          <a:p>
+            <a:r>
+              <a:t>• Business translation: earning the second and third order is the lever that moves a customer up.</a:t>
+            </a:r>
+          </a:p>
+          <a:p>
+            <a:r>
+              <a:t>NEXT: “That Random Forest also solves a practical problem: scoring new customers.”</a:t>
             </a:r>
           </a:p>
         </p:txBody>
@@ -11219,32 +11224,32 @@
           <a:lstStyle/>
           <a:p>
             <a:r>
-              <a:t>[~55s · running 8:55]</a:t>
-            </a:r>
-          </a:p>
-          <a:p>
-            <a:r>
-              <a:t>• Operational question: once segments exist, how do we assign tomorrow's customers?</a:t>
-            </a:r>
-          </a:p>
-          <a:p>
-            <a:r>
-              <a:t>• A 200-tree Random Forest learns the segment boundary; stratified 80/20 split.</a:t>
-            </a:r>
-          </a:p>
-          <a:p>
-            <a:r>
-              <a:t>• 99.4% agreement: 5 of 863 misplaced, all near the boundary.</a:t>
-            </a:r>
-          </a:p>
-          <a:p>
-            <a:r>
-              <a:t>• Say this before the panel does: the target comes from K-means on the same features, so a high score is expected. It shows the rule is learnable and consistent. It is not evidence we can predict future purchasing. That needs a time-split design (FAQ 7).</a:t>
-            </a:r>
-          </a:p>
-          <a:p>
-            <a:r>
-              <a:t>• (Accuracy varies slightly between runs, 99.4–99.7%.)</a:t>
+              <a:t>[~50s · running 7:50]</a:t>
+            </a:r>
+          </a:p>
+          <a:p>
+            <a:r>
+              <a:t>OPEN: “Once segments exist, the business needs to assign tomorrow's customers to them.”</a:t>
+            </a:r>
+          </a:p>
+          <a:p>
+            <a:r>
+              <a:t>• 200-tree Random Forest, stratified 80/20 split: 858 of 863 held-out customers match K-means, 99.4%.</a:t>
+            </a:r>
+          </a:p>
+          <a:p>
+            <a:r>
+              <a:t>• Say this before the panel does: the labels came from K-means on the same features, so this measures reproducibility, not future purchases (FAQ 6, 7 on slides 24–25).</a:t>
+            </a:r>
+          </a:p>
+          <a:p>
+            <a:r>
+              <a:t>• If asked: accuracy varies slightly between runs, 99.4–99.7%.</a:t>
+            </a:r>
+          </a:p>
+          <a:p>
+            <a:r>
+              <a:t>NEXT: “So how should the business act on these segments?”</a:t>
             </a:r>
           </a:p>
         </p:txBody>
@@ -11314,27 +11319,37 @@
           <a:lstStyle/>
           <a:p>
             <a:r>
-              <a:t>[~75s · running 10:10]</a:t>
-            </a:r>
-          </a:p>
-          <a:p>
-            <a:r>
-              <a:t>• The asymmetry is the recommendation: losing just 5% of the top segment costs about 5× more than a good win-back campaign gains.</a:t>
-            </a:r>
-          </a:p>
-          <a:p>
-            <a:r>
-              <a:t>• So priority 1 is retention of High-Value Active: loyalty benefits, a recency trigger at about 60 days (their average recency is 26), and pre-Q4 cross-sell.</a:t>
-            </a:r>
-          </a:p>
-          <a:p>
-            <a:r>
-              <a:t>• Priority 2 is low-cost automated win-back for the lapsing group, with the goal of earning the second order, because Frequency is the key driver.</a:t>
-            </a:r>
-          </a:p>
-          <a:p>
-            <a:r>
-              <a:t>• These figures are illustrative, built from segment averages, with assumptions on the slide. Every action should be A/B-tested against a control group.</a:t>
+              <a:t>[~70s · running 9:00]</a:t>
+            </a:r>
+          </a:p>
+          <a:p>
+            <a:r>
+              <a:t>OPEN: “My core recommendation: the business should protect the 39% before chasing the 61%.”</a:t>
+            </a:r>
+          </a:p>
+          <a:p>
+            <a:r>
+              <a:t>• Risk: losing just 5% of High-Value Active, about 83 customers, puts about £340k at risk.</a:t>
+            </a:r>
+          </a:p>
+          <a:p>
+            <a:r>
+              <a:t>• Upside: winning back 10% of Lapsing, about 265 customers, for one more order adds about £72k.</a:t>
+            </a:r>
+          </a:p>
+          <a:p>
+            <a:r>
+              <a:t>• Actions: a loyalty tier and a ~60-day no-order trigger for the top segment; low-cost automated win-back for the rest.</a:t>
+            </a:r>
+          </a:p>
+          <a:p>
+            <a:r>
+              <a:t>• These are illustrative sizes from segment averages; every action should be A/B-tested against a control group.</a:t>
+            </a:r>
+          </a:p>
+          <a:p>
+            <a:r>
+              <a:t>NEXT: “All of this is available to the business in an interactive dashboard.”</a:t>
             </a:r>
           </a:p>
         </p:txBody>
@@ -11404,27 +11419,42 @@
           <a:lstStyle/>
           <a:p>
             <a:r>
-              <a:t>[~35s · running 10:45]</a:t>
-            </a:r>
-          </a:p>
-          <a:p>
-            <a:r>
-              <a:t>• This is the interactive deliverable from the brief: dashboards/index.html, served locally.</a:t>
-            </a:r>
-          </a:p>
-          <a:p>
-            <a:r>
-              <a:t>• It reads outputs/dashboard_data.json, so it always reflects the latest pipeline run.</a:t>
-            </a:r>
-          </a:p>
-          <a:p>
-            <a:r>
-              <a:t>• It has four views. The warning banner about label accuracy appears on the dashboard itself as well.</a:t>
-            </a:r>
-          </a:p>
-          <a:p>
-            <a:r>
-              <a:t>• Offer a live demo in Q&amp;A if time allows.</a:t>
+              <a:t>[~25s · running 9:25]</a:t>
+            </a:r>
+          </a:p>
+          <a:p>
+            <a:r>
+              <a:t>OPEN: “The dashboard is the interactive deliverable from the brief.”</a:t>
+            </a:r>
+          </a:p>
+          <a:p>
+            <a:r>
+              <a:t>• Four views: Overview, Segments, Model review, Method &amp; notes. It reads the pipeline's JSON, so a rerun refreshes it.</a:t>
+            </a:r>
+          </a:p>
+          <a:p>
+            <a:r>
+              <a:t>• OPTIONAL LIVE DEMO (~60s): only if the clock shows 8:30 or less on arriving here.</a:t>
+            </a:r>
+          </a:p>
+          <a:p>
+            <a:r>
+              <a:t>•    Before the talk: from CapstoneEcommerceSegmentation run  python -m http.server 8000  and open http://localhost:8000/dashboards/index.html in a browser tab.</a:t>
+            </a:r>
+          </a:p>
+          <a:p>
+            <a:r>
+              <a:t>•    Click path: Overview KPIs → Segments → Model review (confusion matrix) → back to the slides.</a:t>
+            </a:r>
+          </a:p>
+          <a:p>
+            <a:r>
+              <a:t>•    If anything fails: “I'll leave you with the screenshot” and move on.</a:t>
+            </a:r>
+          </a:p>
+          <a:p>
+            <a:r>
+              <a:t>NEXT: “Finally, what this work doesn't do yet, and what I'd do next.”</a:t>
             </a:r>
           </a:p>
         </p:txBody>
@@ -11494,22 +11524,27 @@
           <a:lstStyle/>
           <a:p>
             <a:r>
-              <a:t>[~45s · running 11:30]</a:t>
-            </a:r>
-          </a:p>
-          <a:p>
-            <a:r>
-              <a:t>• Be upfront: this is a descriptive segmentation, and the classifier is a scoring tool, not a forecast.</a:t>
-            </a:r>
-          </a:p>
-          <a:p>
-            <a:r>
-              <a:t>• The most valuable next step is the time-split repurchase model, which answers 'predict future purchasing' in the brief properly.</a:t>
-            </a:r>
-          </a:p>
-          <a:p>
-            <a:r>
-              <a:t>• Close the main talk: 'Our key message: 39% of customers drive 85% of revenue, so protecting them is worth far more than chasing the rest.'</a:t>
+              <a:t>[~35s · running 10:00]</a:t>
+            </a:r>
+          </a:p>
+          <a:p>
+            <a:r>
+              <a:t>OPEN: “I want to be clear about the limits of this work.”</a:t>
+            </a:r>
+          </a:p>
+          <a:p>
+            <a:r>
+              <a:t>• Retrospective; coarse at k = 2; circular classifier target; one UK-heavy year; RFM only.</a:t>
+            </a:r>
+          </a:p>
+          <a:p>
+            <a:r>
+              <a:t>• The most valuable next step is a time-split repurchase model: FAQ 7 (slide 25).</a:t>
+            </a:r>
+          </a:p>
+          <a:p>
+            <a:r>
+              <a:t>• CLOSE, word for word: “To sum up: 39% of customers drive 85% of revenue, so protecting them is worth far more than chasing the rest. Thank you. I'm happy to take questions.”</a:t>
             </a:r>
           </a:p>
         </p:txBody>
@@ -11579,7 +11614,99 @@
           <a:lstStyle/>
           <a:p>
             <a:r>
-              <a:t>Invite questions. The FAQ index follows Thank You: click any card to jump to the answer; each FAQ slide links back.</a:t>
+              <a:t>Q&amp;A HABITS</a:t>
+            </a:r>
+          </a:p>
+          <a:p>
+            <a:r>
+              <a:t>1. Repeat or rephrase the question so the whole panel hears it.</a:t>
+            </a:r>
+          </a:p>
+          <a:p>
+            <a:r>
+              <a:t>2. Give the one-sentence answer first; stop and let them ask for more.</a:t>
+            </a:r>
+          </a:p>
+          <a:p>
+            <a:r>
+              <a:t>3. Offer evidence: “I have a backup slide on that. Shall I show it?”</a:t>
+            </a:r>
+          </a:p>
+          <a:p>
+            <a:r>
+              <a:t>4. Jump by typing the slide number and pressing Enter; come back with 15 + Enter.</a:t>
+            </a:r>
+          </a:p>
+          <a:p/>
+          <a:p>
+            <a:r>
+              <a:t>ROUTING CHEAT SHEET (question → slide)</a:t>
+            </a:r>
+          </a:p>
+          <a:p>
+            <a:r>
+              <a:t>• Why log / why scale / why these features? → FAQ 1 · slide 19</a:t>
+            </a:r>
+          </a:p>
+          <a:p>
+            <a:r>
+              <a:t>• Why only 2 segments? Isn't that too few? → FAQ 2 · slide 20, then FAQ 3 · slide 21</a:t>
+            </a:r>
+          </a:p>
+          <a:p>
+            <a:r>
+              <a:t>• Why K-means? Why not DBSCAN, hierarchical or GMM? → slide 8, then FAQ 4 · slide 22</a:t>
+            </a:r>
+          </a:p>
+          <a:p>
+            <a:r>
+              <a:t>• How did you clean the data? What about returns? → FAQ 5 · slide 23</a:t>
+            </a:r>
+          </a:p>
+          <a:p>
+            <a:r>
+              <a:t>• 99% accuracy: leakage? overfitting? → FAQ 6 · slide 24</a:t>
+            </a:r>
+          </a:p>
+          <a:p>
+            <a:r>
+              <a:t>• Can you predict churn or future purchases? → FAQ 7 · slide 25</a:t>
+            </a:r>
+          </a:p>
+          <a:p>
+            <a:r>
+              <a:t>• Are the clusters stable or reproducible? → FAQ 8 · slide 26</a:t>
+            </a:r>
+          </a:p>
+          <a:p>
+            <a:r>
+              <a:t>• Why not product / country features? PCA? → FAQ 9 · slide 27</a:t>
+            </a:r>
+          </a:p>
+          <a:p>
+            <a:r>
+              <a:t>• How were the £340k / £72k figures calculated? → slide 12 footnote</a:t>
+            </a:r>
+          </a:p>
+          <a:p>
+            <a:r>
+              <a:t>• How were the segment names decided? → slide 9: centroid value tier + activity status</a:t>
+            </a:r>
+          </a:p>
+          <a:p>
+            <a:r>
+              <a:t>• Can we see the dashboard? → live demo, or slide 13</a:t>
+            </a:r>
+          </a:p>
+          <a:p/>
+          <a:p>
+            <a:r>
+              <a:t>UNPREPARED QUESTION FALLBACK</a:t>
+            </a:r>
+          </a:p>
+          <a:p>
+            <a:r>
+              <a:t>“That's a good question I haven't tested directly. My expectation is …, and the way I'd check it is ….” Never guess a number.</a:t>
             </a:r>
           </a:p>
         </p:txBody>
@@ -11649,7 +11776,12 @@
           <a:lstStyle/>
           <a:p>
             <a:r>
-              <a:t>Thank the panel.</a:t>
+              <a:t>IF ASKED TO SUM UP (~20s, word for word):</a:t>
+            </a:r>
+          </a:p>
+          <a:p>
+            <a:r>
+              <a:t>“Using RFM features and K-means, I found two stable customer segments. 39% of customers generate 85% of revenue, so the business case says: protect that group first, win back the rest cheaply, and test every action against a control group.”</a:t>
             </a:r>
           </a:p>
         </p:txBody>
@@ -11719,7 +11851,7 @@
           <a:lstStyle/>
           <a:p>
             <a:r>
-              <a:t>Appendix divider. Only enter if asked.</a:t>
+              <a:t>Only enter the appendix when asked. Go straight to the relevant FAQ by typing its slide number + Enter; the FAQ index is slide 18.</a:t>
             </a:r>
           </a:p>
         </p:txBody>
@@ -11789,7 +11921,27 @@
           <a:lstStyle/>
           <a:p>
             <a:r>
-              <a:t>Click a card to jump to that FAQ.</a:t>
+              <a:t>NAVIGATION</a:t>
+            </a:r>
+          </a:p>
+          <a:p>
+            <a:r>
+              <a:t>• Click a card to jump to that FAQ.</a:t>
+            </a:r>
+          </a:p>
+          <a:p>
+            <a:r>
+              <a:t>• On any FAQ slide, click “↩ FAQ index” (bottom left of the navy panel), or type 18 + Enter.</a:t>
+            </a:r>
+          </a:p>
+          <a:p>
+            <a:r>
+              <a:t>• FAQ n is slide n + 18  (FAQ 1 = slide 19, FAQ 9 = slide 27).</a:t>
+            </a:r>
+          </a:p>
+          <a:p>
+            <a:r>
+              <a:t>• Back to the Questions slide: 15 + Enter.</a:t>
             </a:r>
           </a:p>
         </p:txBody>
@@ -11859,12 +12011,35 @@
           <a:lstStyle/>
           <a:p>
             <a:r>
-              <a:t>30-second answer: Distance-based clustering is sensitive to scale and outliers. Monetary has skewness above 20. log1p makes the distributions close to symmetric, and StandardScaler puts the three features in equal units, so no single feature dominates the distance.</a:t>
-            </a:r>
-          </a:p>
-          <a:p>
-            <a:r>
-              <a:t>Likely follow-up: 'Why not RobustScaler or remove outliers?' The log already tames outliers without discarding the wholesale buyers, who are the most valuable customers; removing them would hide the segment we care about most. RobustScaler would be a reasonable sensitivity check.</a:t>
+              <a:t>1 · ONE-LINE ANSWER (say first): “Because K-means uses distance, and without the log and scaling a handful of big spenders and the pound scale would decide the clusters.”</a:t>
+            </a:r>
+          </a:p>
+          <a:p/>
+          <a:p>
+            <a:r>
+              <a:t>2 · IF THEY WANT MORE (~30s): Raw skewness is 20.4 for Monetary and 11.8 for Frequency; after log1p it's 0.4 and 1.2. StandardScaler then gives each feature mean 0 and standard deviation 1, so all three weigh equally. The log comes first because scaling alone doesn't change the shape of a distribution.</a:t>
+            </a:r>
+          </a:p>
+          <a:p/>
+          <a:p>
+            <a:r>
+              <a:t>3 · IF THEY PUSH FURTHER:</a:t>
+            </a:r>
+          </a:p>
+          <a:p>
+            <a:r>
+              <a:t>• Q: Why not remove outliers or use RobustScaler?</a:t>
+            </a:r>
+          </a:p>
+          <a:p>
+            <a:r>
+              <a:t>   A: “The outliers are my most valuable wholesale customers; removing them would hide the segment that matters most. The log tames them while keeping them. RobustScaler would be a reasonable sensitivity check.”</a:t>
+            </a:r>
+          </a:p>
+          <a:p/>
+          <a:p>
+            <a:r>
+              <a:t>DON'T SAY: that the log makes the data normal: Frequency is still skewed (1.2).</a:t>
             </a:r>
           </a:p>
         </p:txBody>
@@ -11934,12 +12109,27 @@
           <a:lstStyle/>
           <a:p>
             <a:r>
-              <a:t>[~20s · running 0:40]</a:t>
-            </a:r>
-          </a:p>
-          <a:p>
-            <a:r>
-              <a:t>Five parts, about 11 minutes. Mention that detailed methodology answers are in an FAQ appendix, so the panel knows deeper questions are welcome.</a:t>
+              <a:t>[~20s · running 0:35]</a:t>
+            </a:r>
+          </a:p>
+          <a:p>
+            <a:r>
+              <a:t>OPEN: “I'll move through five parts, from the business problem to what the business should do next.”</a:t>
+            </a:r>
+          </a:p>
+          <a:p>
+            <a:r>
+              <a:t>• Problem &amp; data → customer behaviour → building segments → segments &amp; drivers → acting on it.</a:t>
+            </a:r>
+          </a:p>
+          <a:p>
+            <a:r>
+              <a:t>• Methodology deep dives are in an FAQ appendix after the close; invite the panel to use it in Q&amp;A.</a:t>
+            </a:r>
+          </a:p>
+          <a:p>
+            <a:r>
+              <a:t>NEXT: “Let me start with the problem.”</a:t>
             </a:r>
           </a:p>
         </p:txBody>
@@ -12009,12 +12199,35 @@
           <a:lstStyle/>
           <a:p>
             <a:r>
-              <a:t>30-second answer: We tested k = 2 to 10. The silhouette peaks clearly at k = 2 (0.43 vs 0.34), and the partition is almost identical across seeds and bootstrap samples. We didn't want to overrule the metric for a nicer story. If the business needs finer targeting, k = 4 is a valid sub-segmentation (next slide).</a:t>
-            </a:r>
-          </a:p>
-          <a:p>
-            <a:r>
-              <a:t>Likely follow-up: 'Isn't a higher silhouette at k = 2 always expected?' Often yes, which is why we also checked Davies-Bouldin (0.89 at k = 2 vs 1.02 at k = 4) and stability, and present k = 4 as the operational alternative.</a:t>
+              <a:t>1 · ONE-LINE ANSWER (say first): “Because the silhouette clearly peaks at two, and I didn't want to overrule my own metric for a nicer story.”</a:t>
+            </a:r>
+          </a:p>
+          <a:p/>
+          <a:p>
+            <a:r>
+              <a:t>2 · IF THEY WANT MORE (~30s): I tested k from 2 to 10: 0.43 at k = 2, 0.34 at k = 3, declining to 0.28 at k = 10. The elbow is smooth. Davies-Bouldin also favours k = 2 (0.89 vs 1.02 at k = 4), and the split is stable (ARI ≈ 0.99). For finer targeting there's k = 4 on the next slide.</a:t>
+            </a:r>
+          </a:p>
+          <a:p/>
+          <a:p>
+            <a:r>
+              <a:t>3 · IF THEY PUSH FURTHER:</a:t>
+            </a:r>
+          </a:p>
+          <a:p>
+            <a:r>
+              <a:t>• Q: Isn't k = 2 usually highest on silhouette anyway?</a:t>
+            </a:r>
+          </a:p>
+          <a:p>
+            <a:r>
+              <a:t>   A: “Often, yes. That's why I also checked Davies-Bouldin and stability, and present k = 4 as the operational option.”</a:t>
+            </a:r>
+          </a:p>
+          <a:p/>
+          <a:p>
+            <a:r>
+              <a:t>DON'T SAY: that two is the 'true' number of customer types.</a:t>
             </a:r>
           </a:p>
         </p:txBody>
@@ -12084,12 +12297,35 @@
           <a:lstStyle/>
           <a:p>
             <a:r>
-              <a:t>30-second answer: At k = 4 we get High-Value Active (709 customers, about 65% of revenue), Mid-Value Cooling (1,179, 24%), Mid-Value Active (855, recent but only about 2 orders) and Low-Value Lapsing (1,571). The top and bottom groups sit entirely inside the k = 2 segments; the two mid groups straddle the k = 2 boundary, which confirms behaviour is a gradient. The silhouette is lower, but k = 4 is more actionable, especially the Cooling group as a churn watch-list.</a:t>
-            </a:r>
-          </a:p>
-          <a:p>
-            <a:r>
-              <a:t>Likely follow-up: 'Then why not present k = 4 as the main result?' Because the evidence favours k = 2; we show k = 4 as a business refinement, not the statistical optimum.</a:t>
+              <a:t>1 · ONE-LINE ANSWER (say first): “Four readable segments with a lower silhouette, 0.33, useful as an operational sub-segmentation.”</a:t>
+            </a:r>
+          </a:p>
+          <a:p/>
+          <a:p>
+            <a:r>
+              <a:t>2 · IF THEY WANT MORE (~30s): High-Value Active 709 customers (about 65% of revenue), Mid-Value Cooling 1,179 (24%), Mid-Value Active 855 (5%, recent but about 2 orders), Low-Value Lapsing 1,571 (6%). The top 709 and bottom 1,571 sit entirely inside the k = 2 groups; the two mid groups straddle the k = 2 boundary, which shows behaviour is a gradient. Mid-Value Cooling is the natural retention watch-list.</a:t>
+            </a:r>
+          </a:p>
+          <a:p/>
+          <a:p>
+            <a:r>
+              <a:t>3 · IF THEY PUSH FURTHER:</a:t>
+            </a:r>
+          </a:p>
+          <a:p>
+            <a:r>
+              <a:t>• Q: Then why not present k = 4 as the main result?</a:t>
+            </a:r>
+          </a:p>
+          <a:p>
+            <a:r>
+              <a:t>   A: “Because the evidence favours k = 2. k = 4 is a business refinement, and I'd validate it with stakeholders and a stability check first.”</a:t>
+            </a:r>
+          </a:p>
+          <a:p/>
+          <a:p>
+            <a:r>
+              <a:t>DON'T SAY: that k = 4 nests neatly inside k = 2, or that its stability was tested.</a:t>
             </a:r>
           </a:p>
         </p:txBody>
@@ -12159,12 +12395,45 @@
           <a:lstStyle/>
           <a:p>
             <a:r>
-              <a:t>30-second answer: All three ran on the same scaled features. K-means has the best silhouette and Davies-Bouldin at both k = 2 and k = 4. DBSCAN needs clearly separated dense regions; RFM behaviour is a gradient, so it labels most customers as one cluster and some as noise. Ward is a reasonable second but greedy, O(n²) memory, and can't score new customers.</a:t>
-            </a:r>
-          </a:p>
-          <a:p>
-            <a:r>
-              <a:t>Likely follow-up: 'Did you tune DBSCAN?' We used the standard defaults; a k-distance plot to choose eps is the right next step, but with a continuous cloud tuning mostly trades noise for one giant cluster. Also possible: 'Why not a Gaussian mixture model?' That's a good extension for soft membership, and is listed as a next step.</a:t>
+              <a:t>1 · ONE-LINE ANSWER (say first): “Customer behaviour is one continuous cloud, which suits centroid methods and defeats density methods.”</a:t>
+            </a:r>
+          </a:p>
+          <a:p/>
+          <a:p>
+            <a:r>
+              <a:t>2 · IF THEY WANT MORE (~30s): Silhouette 0.431 / 0.384 / 0.294; Davies-Bouldin 0.89 / 0.96 / 1.07; at k = 4, K-means 0.333 vs Ward 0.252. DBSCAN with eps 0.5 and min_samples 5 finds one dominant region plus 52 noise points. Ward is close at k = 2 but merges greedily, needs O(n²) memory, and can't score new customers.</a:t>
+            </a:r>
+          </a:p>
+          <a:p/>
+          <a:p>
+            <a:r>
+              <a:t>3 · IF THEY PUSH FURTHER:</a:t>
+            </a:r>
+          </a:p>
+          <a:p>
+            <a:r>
+              <a:t>• Q: Did you tune DBSCAN?</a:t>
+            </a:r>
+          </a:p>
+          <a:p>
+            <a:r>
+              <a:t>   A: “I used standard defaults. A k-distance plot to choose eps is the right next step, but on a continuous cloud tuning mostly trades noise points for one giant cluster.”</a:t>
+            </a:r>
+          </a:p>
+          <a:p>
+            <a:r>
+              <a:t>• Q: Why not a Gaussian mixture model?</a:t>
+            </a:r>
+          </a:p>
+          <a:p>
+            <a:r>
+              <a:t>   A: “It's a good extension: soft membership would show how confident each assignment is. It's on my next-steps list.”</a:t>
+            </a:r>
+          </a:p>
+          <a:p/>
+          <a:p>
+            <a:r>
+              <a:t>DON'T SAY: that DBSCAN is a bad algorithm. It's the wrong fit for this data shape.</a:t>
             </a:r>
           </a:p>
         </p:txBody>
@@ -12234,12 +12503,45 @@
           <a:lstStyle/>
           <a:p>
             <a:r>
-              <a:t>30-second answer: The biggest step is missing CustomerID, about a quarter of rows, which is unavoidable for customer-level RFM. Then cancellations, invalid prices, non-product stock codes and exact duplicates. All rules are transparent and logged.</a:t>
-            </a:r>
-          </a:p>
-          <a:p>
-            <a:r>
-              <a:t>Likely follow-up: 'Doesn't dropping cancellations overstate spend?' Slightly. Netting returns against original purchases would be more exact; cancellations were about 2% of rows. 'Why keep only numeric StockCodes?' Non-numeric codes were service lines like POST, M, D and BANK CHARGES. Note this rule also drops a few lettered product variants, a known trade-off.</a:t>
+              <a:t>1 · ONE-LINE ANSWER (say first): “Five transparent rules took 541,909 rows to 358,277, and each step is logged.”</a:t>
+            </a:r>
+          </a:p>
+          <a:p/>
+          <a:p>
+            <a:r>
+              <a:t>2 · IF THEY WANT MORE (~30s): Missing CustomerID 135,080 (about a quarter), cancellations 8,905, invalid prices 44, non-numeric stock codes 34,793, exact duplicates 4,810.</a:t>
+            </a:r>
+          </a:p>
+          <a:p/>
+          <a:p>
+            <a:r>
+              <a:t>3 · IF THEY PUSH FURTHER:</a:t>
+            </a:r>
+          </a:p>
+          <a:p>
+            <a:r>
+              <a:t>• Q: Doesn't dropping cancellations overstate spend?</a:t>
+            </a:r>
+          </a:p>
+          <a:p>
+            <a:r>
+              <a:t>   A: “Slightly. Netting returns against the original purchases would be more precise; cancellations were 1.6% of rows.”</a:t>
+            </a:r>
+          </a:p>
+          <a:p>
+            <a:r>
+              <a:t>• Q: Why keep only numeric stock codes?</a:t>
+            </a:r>
+          </a:p>
+          <a:p>
+            <a:r>
+              <a:t>   A: “It removes service codes such as POST, M, D and BANK CHARGES, but it also drops real product variants with letter suffixes, like 85123A. That's the cleaning rule I'd revisit first.”</a:t>
+            </a:r>
+          </a:p>
+          <a:p/>
+          <a:p>
+            <a:r>
+              <a:t>DON'T SAY: that all 34,793 stock-code rows were non-products.</a:t>
             </a:r>
           </a:p>
         </p:txBody>
@@ -12309,12 +12611,45 @@
           <a:lstStyle/>
           <a:p>
             <a:r>
-              <a:t>30-second answer: Yes, it's circular, and that's intentional. The labels come from K-means on the same features, so near-perfect accuracy is expected. We present it as a deployable scoring rule, not as predictive power. We did split train/test with stratification, so it isn't memorisation, but the task is easy by construction.</a:t>
-            </a:r>
-          </a:p>
-          <a:p>
-            <a:r>
-              <a:t>Likely follow-up: 'Then why train a classifier at all?' K-means' own predict could assign new customers too; the Random Forest adds feature-importance explanations and makes it easy to add non-RFM features later. The honest predictive version is FAQ 7.</a:t>
+              <a:t>1 · ONE-LINE ANSWER (say first): “It's circular by design: the score shows the K-means labels are reproducible, not that I can predict future purchases.”</a:t>
+            </a:r>
+          </a:p>
+          <a:p/>
+          <a:p>
+            <a:r>
+              <a:t>2 · IF THEY WANT MORE (~30s): The target was created by K-means from the same scaled R, F and M, and K-means boundaries are straight lines in that space, so a Random Forest recovers them almost perfectly: 5 errors in 863, all near the boundary. It's a stratified held-out test, so it isn't memorisation. Its value is a fixed, fast scoring rule for new customers.</a:t>
+            </a:r>
+          </a:p>
+          <a:p/>
+          <a:p>
+            <a:r>
+              <a:t>3 · IF THEY PUSH FURTHER:</a:t>
+            </a:r>
+          </a:p>
+          <a:p>
+            <a:r>
+              <a:t>• Q: Then why train a classifier at all?</a:t>
+            </a:r>
+          </a:p>
+          <a:p>
+            <a:r>
+              <a:t>   A: “K-means' own predict could assign new customers too. The Random Forest adds feature importance and lets me add non-RFM features later. The honest predictive version is FAQ 7.”</a:t>
+            </a:r>
+          </a:p>
+          <a:p>
+            <a:r>
+              <a:t>• Q: Why does accuracy change between runs?</a:t>
+            </a:r>
+          </a:p>
+          <a:p>
+            <a:r>
+              <a:t>   A: “It moves slightly, 99.4 to 99.7%, because a handful of boundary customers flip. It doesn't change any conclusion.”</a:t>
+            </a:r>
+          </a:p>
+          <a:p/>
+          <a:p>
+            <a:r>
+              <a:t>DON'T SAY: “99.4% accuracy shows the model predicts customer behaviour.”</a:t>
             </a:r>
           </a:p>
         </p:txBody>
@@ -12384,12 +12719,45 @@
           <a:lstStyle/>
           <a:p>
             <a:r>
-              <a:t>30-second answer: Choose a cutoff date. Build RFM and other features only from transactions before it. Label each customer by whether they buy in the next 90 days. Train on one cutoff and evaluate on a later one, comparing against a simple recency baseline. That turns this project's segmentation into a genuine forecast and answers 'predict future purchasing' properly.</a:t>
-            </a:r>
-          </a:p>
-          <a:p>
-            <a:r>
-              <a:t>Likely follow-up: 'Why not already done?' The dataset covers only about 12 months with a strong Q4 season, so one clean train/test pair is tight. We prioritised a sound segmentation first. It's the top next step.</a:t>
+              <a:t>1 · ONE-LINE ANSWER (say first): “Split by time: build features only from before a cutoff date and predict purchases in a later window.”</a:t>
+            </a:r>
+          </a:p>
+          <a:p/>
+          <a:p>
+            <a:r>
+              <a:t>2 · IF THEY WANT MORE (~30s): Features from 1 Dec 2010 to 31 Aug 2011; target is whether the customer buys between 1 Sep and 30 Nov 2011, a 90-day window. Validate forward in time, never shuffled, and measure ROC-AUC, precision-recall AUC and top-decile lift against a simple 'most recent buyers' baseline.</a:t>
+            </a:r>
+          </a:p>
+          <a:p/>
+          <a:p>
+            <a:r>
+              <a:t>3 · IF THEY PUSH FURTHER:</a:t>
+            </a:r>
+          </a:p>
+          <a:p>
+            <a:r>
+              <a:t>• Q: Why haven't you built it?</a:t>
+            </a:r>
+          </a:p>
+          <a:p>
+            <a:r>
+              <a:t>   A: “About 12 months of data with a strong Q4 season makes one clean train/test pair tight. I prioritised a sound segmentation first; it's my top next step.”</a:t>
+            </a:r>
+          </a:p>
+          <a:p>
+            <a:r>
+              <a:t>• Q: Wouldn't Q4 seasonality bias it?</a:t>
+            </a:r>
+          </a:p>
+          <a:p>
+            <a:r>
+              <a:t>   A: “Yes. The outcome window includes the peak, so I'd compare against a same-season baseline, or use several cutoffs once more data exists.”</a:t>
+            </a:r>
+          </a:p>
+          <a:p/>
+          <a:p>
+            <a:r>
+              <a:t>DON'T SAY: that this model has been built or evaluated.</a:t>
             </a:r>
           </a:p>
         </p:txBody>
@@ -12459,12 +12827,35 @@
           <a:lstStyle/>
           <a:p>
             <a:r>
-              <a:t>30-second answer: We refit K-means 20 times with different random seeds (single initialisation each) and 20 times on random 80% subsamples, and compared against the full-data labels with the adjusted Rand index. Means are 0.994 and 0.989; the worst case is above 0.97. So the segments are a real structure, not an artefact of initialisation or sample.</a:t>
-            </a:r>
-          </a:p>
-          <a:p>
-            <a:r>
-              <a:t>Likely follow-up: 'Is k = 4 as stable?' Not measured here; it would be the first check before adopting k = 4 operationally.</a:t>
+              <a:t>1 · ONE-LINE ANSWER (say first): “Very stable: 40 refits across seeds and subsamples reproduce almost exactly the same split.”</a:t>
+            </a:r>
+          </a:p>
+          <a:p/>
+          <a:p>
+            <a:r>
+              <a:t>2 · IF THEY WANT MORE (~30s): 20 seeds with a single initialisation each: mean ARI 0.994, minimum 0.990. 20 bootstrap samples of 80%: mean 0.989, minimum 0.977. ARI 1 means identical grouping; 0 means chance.</a:t>
+            </a:r>
+          </a:p>
+          <a:p/>
+          <a:p>
+            <a:r>
+              <a:t>3 · IF THEY PUSH FURTHER:</a:t>
+            </a:r>
+          </a:p>
+          <a:p>
+            <a:r>
+              <a:t>• Q: Is k = 4 as stable?</a:t>
+            </a:r>
+          </a:p>
+          <a:p>
+            <a:r>
+              <a:t>   A: “I haven't measured it; that's the first check before adopting k = 4 operationally.”</a:t>
+            </a:r>
+          </a:p>
+          <a:p/>
+          <a:p>
+            <a:r>
+              <a:t>DON'T SAY: that k = 4 is equally stable.</a:t>
             </a:r>
           </a:p>
         </p:txBody>
@@ -12534,12 +12925,35 @@
           <a:lstStyle/>
           <a:p>
             <a:r>
-              <a:t>30-second answer: The brief specifically asks about recency, frequency and monetary value. RFM is available for every customer and easy for marketing to act on. Correlations are moderate, so each adds information. Adding many features would dilute distance-based clustering and make segments harder to explain. Product-mix and basket features are our first extension.</a:t>
-            </a:r>
-          </a:p>
-          <a:p>
-            <a:r>
-              <a:t>Likely follow-up: 'Would PCA help?' With three features, no; with a richer feature set, PCA or feature selection before clustering would be sensible.</a:t>
+              <a:t>1 · ONE-LINE ANSWER (say first): “Because the brief asked about recency, frequency and monetary value, they exist for every customer, and marketers can act on them.”</a:t>
+            </a:r>
+          </a:p>
+          <a:p/>
+          <a:p>
+            <a:r>
+              <a:t>2 · IF THEY WANT MORE (~30s): Correlations: Frequency–Monetary 0.53, Recency–Frequency −0.26, Recency–Monetary −0.12, so they're related but not redundant. More features dilute distance-based clustering and make segments harder to name. Country adds little: about 89% of transactions are from the UK.</a:t>
+            </a:r>
+          </a:p>
+          <a:p/>
+          <a:p>
+            <a:r>
+              <a:t>3 · IF THEY PUSH FURTHER:</a:t>
+            </a:r>
+          </a:p>
+          <a:p>
+            <a:r>
+              <a:t>• Q: Would PCA help?</a:t>
+            </a:r>
+          </a:p>
+          <a:p>
+            <a:r>
+              <a:t>   A: “With three features, no. With a richer set of product and basket features, PCA or feature selection before clustering would make sense.”</a:t>
+            </a:r>
+          </a:p>
+          <a:p/>
+          <a:p>
+            <a:r>
+              <a:t>DON'T SAY: that RFM captures everything about a customer.</a:t>
             </a:r>
           </a:p>
         </p:txBody>
@@ -12609,22 +13023,32 @@
           <a:lstStyle/>
           <a:p>
             <a:r>
-              <a:t>[~50s · running 1:30]</a:t>
-            </a:r>
-          </a:p>
-          <a:p>
-            <a:r>
-              <a:t>Frame the brief: an e-commerce company wants better marketing and retention by understanding purchasing patterns.</a:t>
-            </a:r>
-          </a:p>
-          <a:p>
-            <a:r>
-              <a:t>• Four objectives map directly to the BIA brief: segment, explain, operationalise, act.</a:t>
-            </a:r>
-          </a:p>
-          <a:p>
-            <a:r>
-              <a:t>• Stress that success is an actionable segmentation, not just a high metric.</a:t>
+              <a:t>[~40s · running 1:15]</a:t>
+            </a:r>
+          </a:p>
+          <a:p>
+            <a:r>
+              <a:t>OPEN: “An e-commerce company wants to spend its marketing and retention budget where it matters, but it doesn't yet know which customers matter.”</a:t>
+            </a:r>
+          </a:p>
+          <a:p>
+            <a:r>
+              <a:t>• Four objectives straight from the brief: segment, explain, operationalise, act.</a:t>
+            </a:r>
+          </a:p>
+          <a:p>
+            <a:r>
+              <a:t>• Segment means comparing K-means, hierarchical clustering and DBSCAN on purchasing behaviour.</a:t>
+            </a:r>
+          </a:p>
+          <a:p>
+            <a:r>
+              <a:t>• Success is an actionable segmentation, not just a high metric.</a:t>
+            </a:r>
+          </a:p>
+          <a:p>
+            <a:r>
+              <a:t>NEXT: “To answer that, I needed clean, customer-level data.”</a:t>
             </a:r>
           </a:p>
         </p:txBody>
@@ -12694,27 +13118,32 @@
           <a:lstStyle/>
           <a:p>
             <a:r>
-              <a:t>[~45s · running 2:15]</a:t>
-            </a:r>
-          </a:p>
-          <a:p>
-            <a:r>
-              <a:t>• Public UCI Online Retail data: a UK gift retailer, Dec 2010 to Dec 2011.</a:t>
-            </a:r>
-          </a:p>
-          <a:p>
-            <a:r>
-              <a:t>• Five cleaning steps; the largest removes 135,080 rows with no CustomerID, since segmentation is per customer.</a:t>
-            </a:r>
-          </a:p>
-          <a:p>
-            <a:r>
-              <a:t>• Cancellations (8,905), non-product codes like postage and fees (34,793) and exact duplicates (4,810) removed.</a:t>
-            </a:r>
-          </a:p>
-          <a:p>
-            <a:r>
-              <a:t>• Result: 358,277 rows, 4,314 customers. Step-by-step detail is FAQ 5.</a:t>
+              <a:t>[~35s · running 1:50]</a:t>
+            </a:r>
+          </a:p>
+          <a:p>
+            <a:r>
+              <a:t>OPEN: “I used the public UCI Online Retail dataset: one year of transactions from a UK gift retailer.”</a:t>
+            </a:r>
+          </a:p>
+          <a:p>
+            <a:r>
+              <a:t>• 541,909 rows → 358,277 after five cleaning rules; 4,314 customers.</a:t>
+            </a:r>
+          </a:p>
+          <a:p>
+            <a:r>
+              <a:t>• Biggest cut: 135,080 rows with no CustomerID, unavoidable for customer-level analysis.</a:t>
+            </a:r>
+          </a:p>
+          <a:p>
+            <a:r>
+              <a:t>• Step-by-step detail is FAQ 5 (slide 23).</a:t>
+            </a:r>
+          </a:p>
+          <a:p>
+            <a:r>
+              <a:t>NEXT: “Before modelling, I looked at what the transactions tell us.”</a:t>
             </a:r>
           </a:p>
         </p:txBody>
@@ -12784,27 +13213,37 @@
           <a:lstStyle/>
           <a:p>
             <a:r>
-              <a:t>[~60s · running 3:15]</a:t>
-            </a:r>
-          </a:p>
-          <a:p>
-            <a:r>
-              <a:t>• Clear seasonality: revenue rises from September and peaks in November, which fits gift buying before Christmas.</a:t>
-            </a:r>
-          </a:p>
-          <a:p>
-            <a:r>
-              <a:t>• Heavy UK concentration: about 89% of transactions.</a:t>
-            </a:r>
-          </a:p>
-          <a:p>
-            <a:r>
-              <a:t>• Spend is extremely skewed: median £614, mean £1,853, max about £265k. That skew drives the log transform on the next slide.</a:t>
-            </a:r>
-          </a:p>
-          <a:p>
-            <a:r>
-              <a:t>• Bridge: 'Rather than cluster raw transactions, we summarise each customer's behaviour.'</a:t>
+              <a:t>[~45s · running 2:35]</a:t>
+            </a:r>
+          </a:p>
+          <a:p>
+            <a:r>
+              <a:t>OPEN: “Three patterns shaped everything that followed.”</a:t>
+            </a:r>
+          </a:p>
+          <a:p>
+            <a:r>
+              <a:t>• Seasonality: revenue climbs from September to a £1.05M peak in November: gift buying.</a:t>
+            </a:r>
+          </a:p>
+          <a:p>
+            <a:r>
+              <a:t>• Concentration: about 89% of transactions (83% of revenue) are from the UK.</a:t>
+            </a:r>
+          </a:p>
+          <a:p>
+            <a:r>
+              <a:t>• Skew: the median customer spends £614, the mean is £1,853, the largest about £265k.</a:t>
+            </a:r>
+          </a:p>
+          <a:p>
+            <a:r>
+              <a:t>• If asked: December 2011 is low only because the data stops on 9 December.</a:t>
+            </a:r>
+          </a:p>
+          <a:p>
+            <a:r>
+              <a:t>NEXT: “That skew is exactly why I didn't cluster the raw numbers.”</a:t>
             </a:r>
           </a:p>
         </p:txBody>
@@ -12874,27 +13313,32 @@
           <a:lstStyle/>
           <a:p>
             <a:r>
-              <a:t>[~50s · running 4:05]</a:t>
-            </a:r>
-          </a:p>
-          <a:p>
-            <a:r>
-              <a:t>• RFM is the standard, interpretable summary of purchase behaviour, and exactly what the brief asks us to analyse.</a:t>
-            </a:r>
-          </a:p>
-          <a:p>
-            <a:r>
-              <a:t>• Recency is days since last purchase against a snapshot one day after the last transaction.</a:t>
-            </a:r>
-          </a:p>
-          <a:p>
-            <a:r>
-              <a:t>• K-means uses Euclidean distance, so a skewed Monetary with values up to £265k would dominate. log1p compresses the tail; StandardScaler equalises units.</a:t>
-            </a:r>
-          </a:p>
-          <a:p>
-            <a:r>
-              <a:t>• Full rationale: FAQ 1.</a:t>
+              <a:t>[~40s · running 3:15]</a:t>
+            </a:r>
+          </a:p>
+          <a:p>
+            <a:r>
+              <a:t>OPEN: “I summarised each customer with three behavioural features: Recency, Frequency and Monetary value.”</a:t>
+            </a:r>
+          </a:p>
+          <a:p>
+            <a:r>
+              <a:t>• Medians: 51 days since last purchase, 2 orders, £614 spend.</a:t>
+            </a:r>
+          </a:p>
+          <a:p>
+            <a:r>
+              <a:t>• log1p then StandardScaler: Monetary skewness falls from 20.4 to 0.4, so no single feature or big spender dominates the distance.</a:t>
+            </a:r>
+          </a:p>
+          <a:p>
+            <a:r>
+              <a:t>• Why this order: FAQ 1 (slide 19).</a:t>
+            </a:r>
+          </a:p>
+          <a:p>
+            <a:r>
+              <a:t>NEXT: “With comparable features, the next question was how many segments.”</a:t>
             </a:r>
           </a:p>
         </p:txBody>
@@ -12964,27 +13408,37 @@
           <a:lstStyle/>
           <a:p>
             <a:r>
-              <a:t>[~60s · running 5:05]</a:t>
-            </a:r>
-          </a:p>
-          <a:p>
-            <a:r>
-              <a:t>• We tested k from 2 to 10 with K-means, n_init = 10, fixed seed.</a:t>
-            </a:r>
-          </a:p>
-          <a:p>
-            <a:r>
-              <a:t>• The silhouette measures how well separated clusters are: k = 2 scores 0.43, a clear drop to 0.34 at k = 3, then a steady decline.</a:t>
-            </a:r>
-          </a:p>
-          <a:p>
-            <a:r>
-              <a:t>• The elbow curve is smooth, which is typical of continuous behavioural data, so it isn't decisive on its own.</a:t>
-            </a:r>
-          </a:p>
-          <a:p>
-            <a:r>
-              <a:t>• We chose the statistically best k rather than forcing a business-friendly number. FAQ 2 and 3 cover 'why only two?' and what k = 4 would look like.</a:t>
+              <a:t>[~55s · running 4:10]</a:t>
+            </a:r>
+          </a:p>
+          <a:p>
+            <a:r>
+              <a:t>OPEN: “I let the data choose the number of segments rather than picking one that sounded good.”</a:t>
+            </a:r>
+          </a:p>
+          <a:p>
+            <a:r>
+              <a:t>• K-means for k = 2 to 10, n_init 10, fixed seed.</a:t>
+            </a:r>
+          </a:p>
+          <a:p>
+            <a:r>
+              <a:t>• Silhouette peaks at k = 2 with 0.43, then drops to 0.34 at k = 3 and keeps declining.</a:t>
+            </a:r>
+          </a:p>
+          <a:p>
+            <a:r>
+              <a:t>• The elbow curve is smooth with no sharp bend, so the silhouette decides.</a:t>
+            </a:r>
+          </a:p>
+          <a:p>
+            <a:r>
+              <a:t>• I keep k = 4 as a finer operational view: FAQ 3 (slide 21).</a:t>
+            </a:r>
+          </a:p>
+          <a:p>
+            <a:r>
+              <a:t>NEXT: “Next, I checked whether K-means was the right algorithm at all.”</a:t>
             </a:r>
           </a:p>
         </p:txBody>
@@ -13054,32 +13508,37 @@
           <a:lstStyle/>
           <a:p>
             <a:r>
-              <a:t>[~60s · running 6:05]</a:t>
-            </a:r>
-          </a:p>
-          <a:p>
-            <a:r>
-              <a:t>• The brief asks us to compare K-means, hierarchical and DBSCAN on the same scaled RFM features.</a:t>
-            </a:r>
-          </a:p>
-          <a:p>
-            <a:r>
-              <a:t>• Silhouette: K-means 0.431, Ward hierarchical 0.384, DBSCAN 0.294 (on non-noise points).</a:t>
-            </a:r>
-          </a:p>
-          <a:p>
-            <a:r>
-              <a:t>• Davies-Bouldin agrees: K-means 0.89 is lowest.</a:t>
-            </a:r>
-          </a:p>
-          <a:p>
-            <a:r>
-              <a:t>• DBSCAN (eps 0.5, min_samples 5) finds one dense blob, a small group and 52 noise points. Customer behaviour is a continuum, not dense islands.</a:t>
-            </a:r>
-          </a:p>
-          <a:p>
-            <a:r>
-              <a:t>• Practical tie-breaker: K-means has a predict step for new customers. Details are in FAQ 4.</a:t>
+              <a:t>[~55s · running 5:05]</a:t>
+            </a:r>
+          </a:p>
+          <a:p>
+            <a:r>
+              <a:t>OPEN: “The brief asked me to compare three families of clustering, so I ran all three on the same features.”</a:t>
+            </a:r>
+          </a:p>
+          <a:p>
+            <a:r>
+              <a:t>• Silhouette: K-means 0.431, Ward hierarchical 0.384, DBSCAN 0.294.</a:t>
+            </a:r>
+          </a:p>
+          <a:p>
+            <a:r>
+              <a:t>• Davies-Bouldin agrees: K-means is lowest at 0.89.</a:t>
+            </a:r>
+          </a:p>
+          <a:p>
+            <a:r>
+              <a:t>• DBSCAN finds one dominant dense region plus 52 noise points: behaviour is a continuum, not separate islands.</a:t>
+            </a:r>
+          </a:p>
+          <a:p>
+            <a:r>
+              <a:t>• Practical tie-breaker: only K-means can score a new customer without refitting.</a:t>
+            </a:r>
+          </a:p>
+          <a:p>
+            <a:r>
+              <a:t>NEXT: “So what do the two K-means segments actually look like?”</a:t>
             </a:r>
           </a:p>
         </p:txBody>
@@ -13149,32 +13608,37 @@
           <a:lstStyle/>
           <a:p>
             <a:r>
-              <a:t>[~70s · running 7:15]</a:t>
-            </a:r>
-          </a:p>
-          <a:p>
-            <a:r>
-              <a:t>• High-Value Active: 1,665 customers who bought about 26 days ago, place about 8 orders, spend about £4,083.</a:t>
-            </a:r>
-          </a:p>
-          <a:p>
-            <a:r>
-              <a:t>• Low-Value Lapsing: 2,649 customers, last seen about 135 days ago, 1–2 orders, about £451.</a:t>
-            </a:r>
-          </a:p>
-          <a:p>
-            <a:r>
-              <a:t>• The headline: 39% of customers generate 85% of revenue (£6.80M of £7.99M).</a:t>
-            </a:r>
-          </a:p>
-          <a:p>
-            <a:r>
-              <a:t>• Names come from each cluster's centroid in scaled RFM space (value tier + activity status), not chosen by hand.</a:t>
-            </a:r>
-          </a:p>
-          <a:p>
-            <a:r>
-              <a:t>• Stable: re-running across seeds and 80% bootstrap samples gives ARI ≈ 0.99 (FAQ 8).</a:t>
+              <a:t>[~70s · running 6:15]</a:t>
+            </a:r>
+          </a:p>
+          <a:p>
+            <a:r>
+              <a:t>OPEN: “Two segments, and they are very unequal.”</a:t>
+            </a:r>
+          </a:p>
+          <a:p>
+            <a:r>
+              <a:t>• High-Value Active: 1,665 customers, last order about 26 days ago, about 8 orders, about £4,083 each.</a:t>
+            </a:r>
+          </a:p>
+          <a:p>
+            <a:r>
+              <a:t>• Low-Value Lapsing: 2,649 customers, about 135 days since last order, 1–2 orders, about £451.</a:t>
+            </a:r>
+          </a:p>
+          <a:p>
+            <a:r>
+              <a:t>• Headline: 39% of customers generate 85% of revenue, £6.80M of £7.99M. Pause here.</a:t>
+            </a:r>
+          </a:p>
+          <a:p>
+            <a:r>
+              <a:t>• Names come from each cluster's centroid (value tier + activity status), not chosen by hand; the split is stable, ARI ≈ 0.99 (FAQ 8).</a:t>
+            </a:r>
+          </a:p>
+          <a:p>
+            <a:r>
+              <a:t>NEXT: “The natural follow-up is: what separates these two groups?”</a:t>
             </a:r>
           </a:p>
         </p:txBody>
@@ -29702,7 +30166,7 @@
                           </a:solidFill>
                           <a:latin typeface="Calibri"/>
                         </a:rPr>
-                        <a:t>Non-product stock codes</a:t>
+                        <a:t>Non-numeric stock codes</a:t>
                       </a:r>
                     </a:p>
                   </a:txBody>
@@ -29771,7 +30235,7 @@
                           </a:solidFill>
                           <a:latin typeface="Calibri"/>
                         </a:rPr>
-                        <a:t>Postage, fees, manual and bank-charge codes aren't products</a:t>
+                        <a:t>Drops service codes (POST, BANK CHARGES) but also lettered variants like 85123A</a:t>
                       </a:r>
                     </a:p>
                   </a:txBody>
